--- a/examples/research_exp/figures/figure4.pptx
+++ b/examples/research_exp/figures/figure4.pptx
@@ -2975,10 +2975,10 @@
       </p:grpSpPr>
       <p:grpSp>
         <p:nvGrpSpPr>
-          <p:cNvPr id="5" name="그룹 4">
+          <p:cNvPr id="10" name="그룹 9">
             <a:extLst>
               <a:ext uri="{FF2B5EF4-FFF2-40B4-BE49-F238E27FC236}">
-                <a16:creationId xmlns:a16="http://schemas.microsoft.com/office/drawing/2014/main" id="{615FA258-8E14-69A2-1500-77349F6D9537}"/>
+                <a16:creationId xmlns:a16="http://schemas.microsoft.com/office/drawing/2014/main" id="{AD456FDE-5C9A-68C4-540D-9EA902DEC94D}"/>
               </a:ext>
             </a:extLst>
           </p:cNvPr>
@@ -2989,134 +2989,335 @@
           <a:xfrm>
             <a:off x="22906" y="0"/>
             <a:ext cx="17945100" cy="18004720"/>
-            <a:chOff x="200024" y="-17802225"/>
-            <a:chExt cx="17202150" cy="17259302"/>
+            <a:chOff x="22906" y="0"/>
+            <a:chExt cx="17945100" cy="18004720"/>
           </a:xfrm>
         </p:grpSpPr>
-        <p:pic>
-          <p:nvPicPr>
-            <p:cNvPr id="48" name="그림 47" descr="스크린샷, 직사각형, 사각형, 디자인이(가) 표시된 사진&#10;&#10;AI 생성 콘텐츠는 정확하지 않을 수 있습니다.">
+        <p:grpSp>
+          <p:nvGrpSpPr>
+            <p:cNvPr id="5" name="그룹 4">
               <a:extLst>
                 <a:ext uri="{FF2B5EF4-FFF2-40B4-BE49-F238E27FC236}">
-                  <a16:creationId xmlns:a16="http://schemas.microsoft.com/office/drawing/2014/main" id="{D4CCA760-D245-C55B-9493-D40303E088A6}"/>
+                  <a16:creationId xmlns:a16="http://schemas.microsoft.com/office/drawing/2014/main" id="{615FA258-8E14-69A2-1500-77349F6D9537}"/>
                 </a:ext>
               </a:extLst>
             </p:cNvPr>
-            <p:cNvPicPr>
-              <a:picLocks noChangeAspect="1"/>
-            </p:cNvPicPr>
+            <p:cNvGrpSpPr/>
             <p:nvPr/>
-          </p:nvPicPr>
-          <p:blipFill>
-            <a:blip r:embed="rId2"/>
-            <a:srcRect l="1115" t="552" r="50926" b="75477"/>
-            <a:stretch>
-              <a:fillRect/>
-            </a:stretch>
-          </p:blipFill>
+          </p:nvGrpSpPr>
+          <p:grpSpPr>
+            <a:xfrm>
+              <a:off x="22906" y="0"/>
+              <a:ext cx="17945100" cy="18004720"/>
+              <a:chOff x="200024" y="-17802225"/>
+              <a:chExt cx="17202150" cy="17259302"/>
+            </a:xfrm>
+          </p:grpSpPr>
+          <p:pic>
+            <p:nvPicPr>
+              <p:cNvPr id="48" name="그림 47" descr="스크린샷, 직사각형, 사각형, 디자인이(가) 표시된 사진&#10;&#10;AI 생성 콘텐츠는 정확하지 않을 수 있습니다.">
+                <a:extLst>
+                  <a:ext uri="{FF2B5EF4-FFF2-40B4-BE49-F238E27FC236}">
+                    <a16:creationId xmlns:a16="http://schemas.microsoft.com/office/drawing/2014/main" id="{D4CCA760-D245-C55B-9493-D40303E088A6}"/>
+                  </a:ext>
+                </a:extLst>
+              </p:cNvPr>
+              <p:cNvPicPr>
+                <a:picLocks noChangeAspect="1"/>
+              </p:cNvPicPr>
+              <p:nvPr/>
+            </p:nvPicPr>
+            <p:blipFill>
+              <a:blip r:embed="rId2"/>
+              <a:srcRect l="1115" t="552" r="50926" b="75477"/>
+              <a:stretch>
+                <a:fillRect/>
+              </a:stretch>
+            </p:blipFill>
+            <p:spPr>
+              <a:xfrm>
+                <a:off x="200024" y="-17802225"/>
+                <a:ext cx="8601075" cy="8629650"/>
+              </a:xfrm>
+              <a:prstGeom prst="rect">
+                <a:avLst/>
+              </a:prstGeom>
+            </p:spPr>
+          </p:pic>
+          <p:pic>
+            <p:nvPicPr>
+              <p:cNvPr id="2" name="그림 1" descr="스크린샷, 직사각형, 사각형, 디자인이(가) 표시된 사진&#10;&#10;AI 생성 콘텐츠는 정확하지 않을 수 있습니다.">
+                <a:extLst>
+                  <a:ext uri="{FF2B5EF4-FFF2-40B4-BE49-F238E27FC236}">
+                    <a16:creationId xmlns:a16="http://schemas.microsoft.com/office/drawing/2014/main" id="{B44D2DAC-C5FB-E988-62E8-8ADF6BEA953A}"/>
+                  </a:ext>
+                </a:extLst>
+              </p:cNvPr>
+              <p:cNvPicPr>
+                <a:picLocks noChangeAspect="1"/>
+              </p:cNvPicPr>
+              <p:nvPr/>
+            </p:nvPicPr>
+            <p:blipFill>
+              <a:blip r:embed="rId2"/>
+              <a:srcRect l="1116" t="25555" r="50924" b="50475"/>
+              <a:stretch>
+                <a:fillRect/>
+              </a:stretch>
+            </p:blipFill>
+            <p:spPr>
+              <a:xfrm>
+                <a:off x="8801099" y="-17802225"/>
+                <a:ext cx="8601075" cy="8629651"/>
+              </a:xfrm>
+              <a:prstGeom prst="rect">
+                <a:avLst/>
+              </a:prstGeom>
+            </p:spPr>
+          </p:pic>
+          <p:pic>
+            <p:nvPicPr>
+              <p:cNvPr id="3" name="그림 2" descr="스크린샷, 직사각형, 사각형, 디자인이(가) 표시된 사진&#10;&#10;AI 생성 콘텐츠는 정확하지 않을 수 있습니다.">
+                <a:extLst>
+                  <a:ext uri="{FF2B5EF4-FFF2-40B4-BE49-F238E27FC236}">
+                    <a16:creationId xmlns:a16="http://schemas.microsoft.com/office/drawing/2014/main" id="{D97F3911-1AD9-F87E-BC6E-440374D15181}"/>
+                  </a:ext>
+                </a:extLst>
+              </p:cNvPr>
+              <p:cNvPicPr>
+                <a:picLocks noChangeAspect="1"/>
+              </p:cNvPicPr>
+              <p:nvPr/>
+            </p:nvPicPr>
+            <p:blipFill>
+              <a:blip r:embed="rId2"/>
+              <a:srcRect l="1082" t="50636" r="50959" b="25394"/>
+              <a:stretch>
+                <a:fillRect/>
+              </a:stretch>
+            </p:blipFill>
+            <p:spPr>
+              <a:xfrm>
+                <a:off x="200024" y="-9172575"/>
+                <a:ext cx="8601075" cy="8629652"/>
+              </a:xfrm>
+              <a:prstGeom prst="rect">
+                <a:avLst/>
+              </a:prstGeom>
+            </p:spPr>
+          </p:pic>
+          <p:pic>
+            <p:nvPicPr>
+              <p:cNvPr id="4" name="그림 3" descr="스크린샷, 직사각형, 사각형, 디자인이(가) 표시된 사진&#10;&#10;AI 생성 콘텐츠는 정확하지 않을 수 있습니다.">
+                <a:extLst>
+                  <a:ext uri="{FF2B5EF4-FFF2-40B4-BE49-F238E27FC236}">
+                    <a16:creationId xmlns:a16="http://schemas.microsoft.com/office/drawing/2014/main" id="{F65BB3D8-BA4E-AF88-2523-321F11C9D20C}"/>
+                  </a:ext>
+                </a:extLst>
+              </p:cNvPr>
+              <p:cNvPicPr>
+                <a:picLocks noChangeAspect="1"/>
+              </p:cNvPicPr>
+              <p:nvPr/>
+            </p:nvPicPr>
+            <p:blipFill>
+              <a:blip r:embed="rId2"/>
+              <a:srcRect l="51067" t="75554" r="974" b="477"/>
+              <a:stretch>
+                <a:fillRect/>
+              </a:stretch>
+            </p:blipFill>
+            <p:spPr>
+              <a:xfrm>
+                <a:off x="8801099" y="-9172575"/>
+                <a:ext cx="8601075" cy="8629652"/>
+              </a:xfrm>
+              <a:prstGeom prst="rect">
+                <a:avLst/>
+              </a:prstGeom>
+            </p:spPr>
+          </p:pic>
+        </p:grpSp>
+        <p:sp>
+          <p:nvSpPr>
+            <p:cNvPr id="6" name="TextBox 5">
+              <a:extLst>
+                <a:ext uri="{FF2B5EF4-FFF2-40B4-BE49-F238E27FC236}">
+                  <a16:creationId xmlns:a16="http://schemas.microsoft.com/office/drawing/2014/main" id="{5D79D418-895A-8C5E-E560-6A438CA4918A}"/>
+                </a:ext>
+              </a:extLst>
+            </p:cNvPr>
+            <p:cNvSpPr txBox="1"/>
+            <p:nvPr/>
+          </p:nvSpPr>
           <p:spPr>
             <a:xfrm>
-              <a:off x="200024" y="-17802225"/>
-              <a:ext cx="8601075" cy="8629650"/>
+              <a:off x="175532" y="116474"/>
+              <a:ext cx="1102178" cy="1107996"/>
             </a:xfrm>
             <a:prstGeom prst="rect">
               <a:avLst/>
             </a:prstGeom>
+            <a:solidFill>
+              <a:schemeClr val="bg1"/>
+            </a:solidFill>
           </p:spPr>
-        </p:pic>
-        <p:pic>
-          <p:nvPicPr>
-            <p:cNvPr id="2" name="그림 1" descr="스크린샷, 직사각형, 사각형, 디자인이(가) 표시된 사진&#10;&#10;AI 생성 콘텐츠는 정확하지 않을 수 있습니다.">
+          <p:txBody>
+            <a:bodyPr wrap="square" rtlCol="0" anchor="ctr">
+              <a:spAutoFit/>
+            </a:bodyPr>
+            <a:lstStyle/>
+            <a:p>
+              <a:pPr algn="ctr"/>
+              <a:r>
+                <a:rPr kumimoji="1" lang="en-US" altLang="ko-KR" sz="6600" dirty="0">
+                  <a:latin typeface="Times New Roman" panose="02020603050405020304" pitchFamily="18" charset="0"/>
+                  <a:cs typeface="Times New Roman" panose="02020603050405020304" pitchFamily="18" charset="0"/>
+                </a:rPr>
+                <a:t>(a)</a:t>
+              </a:r>
+              <a:endParaRPr kumimoji="1" lang="ko-KR" altLang="en-US" sz="6600" dirty="0">
+                <a:latin typeface="Times New Roman" panose="02020603050405020304" pitchFamily="18" charset="0"/>
+                <a:cs typeface="Times New Roman" panose="02020603050405020304" pitchFamily="18" charset="0"/>
+              </a:endParaRPr>
+            </a:p>
+          </p:txBody>
+        </p:sp>
+        <p:sp>
+          <p:nvSpPr>
+            <p:cNvPr id="7" name="TextBox 6">
               <a:extLst>
                 <a:ext uri="{FF2B5EF4-FFF2-40B4-BE49-F238E27FC236}">
-                  <a16:creationId xmlns:a16="http://schemas.microsoft.com/office/drawing/2014/main" id="{B44D2DAC-C5FB-E988-62E8-8ADF6BEA953A}"/>
+                  <a16:creationId xmlns:a16="http://schemas.microsoft.com/office/drawing/2014/main" id="{C32ECDBE-EFA7-6304-694D-90F1569B4B9B}"/>
                 </a:ext>
               </a:extLst>
             </p:cNvPr>
-            <p:cNvPicPr>
-              <a:picLocks noChangeAspect="1"/>
-            </p:cNvPicPr>
+            <p:cNvSpPr txBox="1"/>
             <p:nvPr/>
-          </p:nvPicPr>
-          <p:blipFill>
-            <a:blip r:embed="rId2"/>
-            <a:srcRect l="1116" t="25555" r="50924" b="50475"/>
-            <a:stretch>
-              <a:fillRect/>
-            </a:stretch>
-          </p:blipFill>
+          </p:nvSpPr>
           <p:spPr>
             <a:xfrm>
-              <a:off x="8801099" y="-17802225"/>
-              <a:ext cx="8601075" cy="8629651"/>
+              <a:off x="9156246" y="116474"/>
+              <a:ext cx="1102178" cy="1107996"/>
             </a:xfrm>
             <a:prstGeom prst="rect">
               <a:avLst/>
             </a:prstGeom>
+            <a:solidFill>
+              <a:schemeClr val="bg1"/>
+            </a:solidFill>
           </p:spPr>
-        </p:pic>
-        <p:pic>
-          <p:nvPicPr>
-            <p:cNvPr id="3" name="그림 2" descr="스크린샷, 직사각형, 사각형, 디자인이(가) 표시된 사진&#10;&#10;AI 생성 콘텐츠는 정확하지 않을 수 있습니다.">
+          <p:txBody>
+            <a:bodyPr wrap="square" rtlCol="0" anchor="ctr">
+              <a:spAutoFit/>
+            </a:bodyPr>
+            <a:lstStyle/>
+            <a:p>
+              <a:pPr algn="ctr"/>
+              <a:r>
+                <a:rPr kumimoji="1" lang="en-US" altLang="ko-KR" sz="6600" dirty="0">
+                  <a:latin typeface="Times New Roman" panose="02020603050405020304" pitchFamily="18" charset="0"/>
+                  <a:cs typeface="Times New Roman" panose="02020603050405020304" pitchFamily="18" charset="0"/>
+                </a:rPr>
+                <a:t>(b)</a:t>
+              </a:r>
+              <a:endParaRPr kumimoji="1" lang="ko-KR" altLang="en-US" sz="6600" dirty="0">
+                <a:latin typeface="Times New Roman" panose="02020603050405020304" pitchFamily="18" charset="0"/>
+                <a:cs typeface="Times New Roman" panose="02020603050405020304" pitchFamily="18" charset="0"/>
+              </a:endParaRPr>
+            </a:p>
+          </p:txBody>
+        </p:sp>
+        <p:sp>
+          <p:nvSpPr>
+            <p:cNvPr id="8" name="TextBox 7">
               <a:extLst>
                 <a:ext uri="{FF2B5EF4-FFF2-40B4-BE49-F238E27FC236}">
-                  <a16:creationId xmlns:a16="http://schemas.microsoft.com/office/drawing/2014/main" id="{D97F3911-1AD9-F87E-BC6E-440374D15181}"/>
+                  <a16:creationId xmlns:a16="http://schemas.microsoft.com/office/drawing/2014/main" id="{4F7D7580-FE85-621A-1918-4B2D0CF96D30}"/>
                 </a:ext>
               </a:extLst>
             </p:cNvPr>
-            <p:cNvPicPr>
-              <a:picLocks noChangeAspect="1"/>
-            </p:cNvPicPr>
+            <p:cNvSpPr txBox="1"/>
             <p:nvPr/>
-          </p:nvPicPr>
-          <p:blipFill>
-            <a:blip r:embed="rId2"/>
-            <a:srcRect l="1082" t="50636" r="50959" b="25394"/>
-            <a:stretch>
-              <a:fillRect/>
-            </a:stretch>
-          </p:blipFill>
+          </p:nvSpPr>
           <p:spPr>
             <a:xfrm>
-              <a:off x="200024" y="-9172575"/>
-              <a:ext cx="8601075" cy="8629652"/>
+              <a:off x="175532" y="9162503"/>
+              <a:ext cx="1102178" cy="1107996"/>
             </a:xfrm>
             <a:prstGeom prst="rect">
               <a:avLst/>
             </a:prstGeom>
+            <a:solidFill>
+              <a:schemeClr val="bg1"/>
+            </a:solidFill>
           </p:spPr>
-        </p:pic>
-        <p:pic>
-          <p:nvPicPr>
-            <p:cNvPr id="4" name="그림 3" descr="스크린샷, 직사각형, 사각형, 디자인이(가) 표시된 사진&#10;&#10;AI 생성 콘텐츠는 정확하지 않을 수 있습니다.">
+          <p:txBody>
+            <a:bodyPr wrap="square" rtlCol="0" anchor="ctr">
+              <a:spAutoFit/>
+            </a:bodyPr>
+            <a:lstStyle/>
+            <a:p>
+              <a:pPr algn="ctr"/>
+              <a:r>
+                <a:rPr kumimoji="1" lang="en-US" altLang="ko-KR" sz="6600" dirty="0">
+                  <a:latin typeface="Times New Roman" panose="02020603050405020304" pitchFamily="18" charset="0"/>
+                  <a:cs typeface="Times New Roman" panose="02020603050405020304" pitchFamily="18" charset="0"/>
+                </a:rPr>
+                <a:t>(c)</a:t>
+              </a:r>
+              <a:endParaRPr kumimoji="1" lang="ko-KR" altLang="en-US" sz="6600" dirty="0">
+                <a:latin typeface="Times New Roman" panose="02020603050405020304" pitchFamily="18" charset="0"/>
+                <a:cs typeface="Times New Roman" panose="02020603050405020304" pitchFamily="18" charset="0"/>
+              </a:endParaRPr>
+            </a:p>
+          </p:txBody>
+        </p:sp>
+        <p:sp>
+          <p:nvSpPr>
+            <p:cNvPr id="9" name="TextBox 8">
               <a:extLst>
                 <a:ext uri="{FF2B5EF4-FFF2-40B4-BE49-F238E27FC236}">
-                  <a16:creationId xmlns:a16="http://schemas.microsoft.com/office/drawing/2014/main" id="{F65BB3D8-BA4E-AF88-2523-321F11C9D20C}"/>
+                  <a16:creationId xmlns:a16="http://schemas.microsoft.com/office/drawing/2014/main" id="{61F2CBF6-4567-B379-F55D-CFF664127EF9}"/>
                 </a:ext>
               </a:extLst>
             </p:cNvPr>
-            <p:cNvPicPr>
-              <a:picLocks noChangeAspect="1"/>
-            </p:cNvPicPr>
+            <p:cNvSpPr txBox="1"/>
             <p:nvPr/>
-          </p:nvPicPr>
-          <p:blipFill>
-            <a:blip r:embed="rId2"/>
-            <a:srcRect l="51067" t="75554" r="974" b="477"/>
-            <a:stretch>
-              <a:fillRect/>
-            </a:stretch>
-          </p:blipFill>
+          </p:nvSpPr>
           <p:spPr>
             <a:xfrm>
-              <a:off x="8801099" y="-9172575"/>
-              <a:ext cx="8601075" cy="8629652"/>
+              <a:off x="9156247" y="9162503"/>
+              <a:ext cx="1102178" cy="1107996"/>
             </a:xfrm>
             <a:prstGeom prst="rect">
               <a:avLst/>
             </a:prstGeom>
+            <a:solidFill>
+              <a:schemeClr val="bg1"/>
+            </a:solidFill>
           </p:spPr>
-        </p:pic>
+          <p:txBody>
+            <a:bodyPr wrap="square" rtlCol="0" anchor="ctr">
+              <a:spAutoFit/>
+            </a:bodyPr>
+            <a:lstStyle/>
+            <a:p>
+              <a:pPr algn="ctr"/>
+              <a:r>
+                <a:rPr kumimoji="1" lang="en-US" altLang="ko-KR" sz="6600" dirty="0">
+                  <a:latin typeface="Times New Roman" panose="02020603050405020304" pitchFamily="18" charset="0"/>
+                  <a:cs typeface="Times New Roman" panose="02020603050405020304" pitchFamily="18" charset="0"/>
+                </a:rPr>
+                <a:t>(d)</a:t>
+              </a:r>
+              <a:endParaRPr kumimoji="1" lang="ko-KR" altLang="en-US" sz="6600" dirty="0">
+                <a:latin typeface="Times New Roman" panose="02020603050405020304" pitchFamily="18" charset="0"/>
+                <a:cs typeface="Times New Roman" panose="02020603050405020304" pitchFamily="18" charset="0"/>
+              </a:endParaRPr>
+            </a:p>
+          </p:txBody>
+        </p:sp>
       </p:grpSp>
     </p:spTree>
     <p:extLst>
